--- a/docs/swate-logo.pptx
+++ b/docs/swate-logo.pptx
@@ -7,6 +7,8 @@
   <p:sldIdLst>
     <p:sldId id="256" r:id="rId2"/>
     <p:sldId id="257" r:id="rId3"/>
+    <p:sldId id="258" r:id="rId4"/>
+    <p:sldId id="259" r:id="rId5"/>
   </p:sldIdLst>
   <p:sldSz cx="12192000" cy="6858000"/>
   <p:notesSz cx="6858000" cy="9144000"/>
@@ -271,7 +273,7 @@
           <a:p>
             <a:fld id="{48A41D39-81A9-4ADC-B968-CAB55AEB7B2F}" type="datetimeFigureOut">
               <a:rPr lang="en-US" smtClean="0"/>
-              <a:t>6/10/2026</a:t>
+              <a:t>7/17/2026</a:t>
             </a:fld>
             <a:endParaRPr lang="en-US"/>
           </a:p>
@@ -469,7 +471,7 @@
           <a:p>
             <a:fld id="{48A41D39-81A9-4ADC-B968-CAB55AEB7B2F}" type="datetimeFigureOut">
               <a:rPr lang="en-US" smtClean="0"/>
-              <a:t>6/10/2026</a:t>
+              <a:t>7/17/2026</a:t>
             </a:fld>
             <a:endParaRPr lang="en-US"/>
           </a:p>
@@ -677,7 +679,7 @@
           <a:p>
             <a:fld id="{48A41D39-81A9-4ADC-B968-CAB55AEB7B2F}" type="datetimeFigureOut">
               <a:rPr lang="en-US" smtClean="0"/>
-              <a:t>6/10/2026</a:t>
+              <a:t>7/17/2026</a:t>
             </a:fld>
             <a:endParaRPr lang="en-US"/>
           </a:p>
@@ -875,7 +877,7 @@
           <a:p>
             <a:fld id="{48A41D39-81A9-4ADC-B968-CAB55AEB7B2F}" type="datetimeFigureOut">
               <a:rPr lang="en-US" smtClean="0"/>
-              <a:t>6/10/2026</a:t>
+              <a:t>7/17/2026</a:t>
             </a:fld>
             <a:endParaRPr lang="en-US"/>
           </a:p>
@@ -1150,7 +1152,7 @@
           <a:p>
             <a:fld id="{48A41D39-81A9-4ADC-B968-CAB55AEB7B2F}" type="datetimeFigureOut">
               <a:rPr lang="en-US" smtClean="0"/>
-              <a:t>6/10/2026</a:t>
+              <a:t>7/17/2026</a:t>
             </a:fld>
             <a:endParaRPr lang="en-US"/>
           </a:p>
@@ -1415,7 +1417,7 @@
           <a:p>
             <a:fld id="{48A41D39-81A9-4ADC-B968-CAB55AEB7B2F}" type="datetimeFigureOut">
               <a:rPr lang="en-US" smtClean="0"/>
-              <a:t>6/10/2026</a:t>
+              <a:t>7/17/2026</a:t>
             </a:fld>
             <a:endParaRPr lang="en-US"/>
           </a:p>
@@ -1827,7 +1829,7 @@
           <a:p>
             <a:fld id="{48A41D39-81A9-4ADC-B968-CAB55AEB7B2F}" type="datetimeFigureOut">
               <a:rPr lang="en-US" smtClean="0"/>
-              <a:t>6/10/2026</a:t>
+              <a:t>7/17/2026</a:t>
             </a:fld>
             <a:endParaRPr lang="en-US"/>
           </a:p>
@@ -1968,7 +1970,7 @@
           <a:p>
             <a:fld id="{48A41D39-81A9-4ADC-B968-CAB55AEB7B2F}" type="datetimeFigureOut">
               <a:rPr lang="en-US" smtClean="0"/>
-              <a:t>6/10/2026</a:t>
+              <a:t>7/17/2026</a:t>
             </a:fld>
             <a:endParaRPr lang="en-US"/>
           </a:p>
@@ -2081,7 +2083,7 @@
           <a:p>
             <a:fld id="{48A41D39-81A9-4ADC-B968-CAB55AEB7B2F}" type="datetimeFigureOut">
               <a:rPr lang="en-US" smtClean="0"/>
-              <a:t>6/10/2026</a:t>
+              <a:t>7/17/2026</a:t>
             </a:fld>
             <a:endParaRPr lang="en-US"/>
           </a:p>
@@ -2392,7 +2394,7 @@
           <a:p>
             <a:fld id="{48A41D39-81A9-4ADC-B968-CAB55AEB7B2F}" type="datetimeFigureOut">
               <a:rPr lang="en-US" smtClean="0"/>
-              <a:t>6/10/2026</a:t>
+              <a:t>7/17/2026</a:t>
             </a:fld>
             <a:endParaRPr lang="en-US"/>
           </a:p>
@@ -2680,7 +2682,7 @@
           <a:p>
             <a:fld id="{48A41D39-81A9-4ADC-B968-CAB55AEB7B2F}" type="datetimeFigureOut">
               <a:rPr lang="en-US" smtClean="0"/>
-              <a:t>6/10/2026</a:t>
+              <a:t>7/17/2026</a:t>
             </a:fld>
             <a:endParaRPr lang="en-US"/>
           </a:p>
@@ -2921,7 +2923,7 @@
           <a:p>
             <a:fld id="{48A41D39-81A9-4ADC-B968-CAB55AEB7B2F}" type="datetimeFigureOut">
               <a:rPr lang="en-US" smtClean="0"/>
-              <a:t>6/10/2026</a:t>
+              <a:t>7/17/2026</a:t>
             </a:fld>
             <a:endParaRPr lang="en-US"/>
           </a:p>
@@ -3429,23 +3431,50 @@
           <a:gradFill flip="none" rotWithShape="1">
             <a:gsLst>
               <a:gs pos="78000">
-                <a:srgbClr val="137464"/>
+                <a:schemeClr val="bg2">
+                  <a:lumMod val="25000"/>
+                </a:schemeClr>
               </a:gs>
               <a:gs pos="12000">
-                <a:srgbClr val="1FC2A7"/>
+                <a:schemeClr val="bg2">
+                  <a:lumMod val="90000"/>
+                </a:schemeClr>
               </a:gs>
               <a:gs pos="49000">
-                <a:srgbClr val="79DACA"/>
+                <a:schemeClr val="bg2">
+                  <a:lumMod val="50000"/>
+                </a:schemeClr>
               </a:gs>
             </a:gsLst>
             <a:lin ang="2700000" scaled="1"/>
             <a:tileRect/>
           </a:gradFill>
-          <a:ln>
-            <a:solidFill>
-              <a:srgbClr val="0C4E43"/>
-            </a:solidFill>
+          <a:ln w="76200">
+            <a:gradFill>
+              <a:gsLst>
+                <a:gs pos="0">
+                  <a:srgbClr val="79DACA"/>
+                </a:gs>
+                <a:gs pos="74000">
+                  <a:srgbClr val="137464"/>
+                </a:gs>
+                <a:gs pos="37000">
+                  <a:srgbClr val="1FC2A7"/>
+                </a:gs>
+                <a:gs pos="100000">
+                  <a:srgbClr val="0C4E43"/>
+                </a:gs>
+              </a:gsLst>
+              <a:lin ang="5400000" scaled="1"/>
+            </a:gradFill>
           </a:ln>
+          <a:effectLst>
+            <a:glow>
+              <a:srgbClr val="79DACA">
+                <a:alpha val="80000"/>
+              </a:srgbClr>
+            </a:glow>
+          </a:effectLst>
         </p:spPr>
         <p:style>
           <a:lnRef idx="2">
@@ -3477,22 +3506,13 @@
           <a:p>
             <a:pPr algn="ctr"/>
             <a:r>
-              <a:rPr lang="en-US" sz="49600" dirty="0">
+              <a:rPr lang="en-US" sz="21000" dirty="0">
                 <a:solidFill>
-                  <a:schemeClr val="bg1">
-                    <a:lumMod val="95000"/>
-                  </a:schemeClr>
+                  <a:srgbClr val="1FC2A7"/>
                 </a:solidFill>
               </a:rPr>
-              <a:t>S</a:t>
-            </a:r>
-            <a:endParaRPr lang="en-US" dirty="0">
-              <a:solidFill>
-                <a:schemeClr val="bg1">
-                  <a:lumMod val="95000"/>
-                </a:schemeClr>
-              </a:solidFill>
-            </a:endParaRPr>
+              <a:t>ARC</a:t>
+            </a:r>
           </a:p>
         </p:txBody>
       </p:sp>
@@ -3500,6 +3520,217 @@
     <p:extLst>
       <p:ext uri="{BB962C8B-B14F-4D97-AF65-F5344CB8AC3E}">
         <p14:creationId xmlns:p14="http://schemas.microsoft.com/office/powerpoint/2010/main" val="3937608360"/>
+      </p:ext>
+    </p:extLst>
+  </p:cSld>
+  <p:clrMapOvr>
+    <a:masterClrMapping/>
+  </p:clrMapOvr>
+</p:sld>
+</file>
+
+<file path=ppt/slides/slide3.xml><?xml version="1.0" encoding="utf-8"?>
+<p:sld xmlns:a="http://schemas.openxmlformats.org/drawingml/2006/main" xmlns:r="http://schemas.openxmlformats.org/officeDocument/2006/relationships" xmlns:p="http://schemas.openxmlformats.org/presentationml/2006/main">
+  <p:cSld>
+    <p:spTree>
+      <p:nvGrpSpPr>
+        <p:cNvPr id="1" name="">
+          <a:extLst>
+            <a:ext uri="{FF2B5EF4-FFF2-40B4-BE49-F238E27FC236}">
+              <a16:creationId xmlns:a16="http://schemas.microsoft.com/office/drawing/2014/main" id="{3CE09E81-3DD9-0591-B264-D4EEC269673D}"/>
+            </a:ext>
+          </a:extLst>
+        </p:cNvPr>
+        <p:cNvGrpSpPr/>
+        <p:nvPr/>
+      </p:nvGrpSpPr>
+      <p:grpSpPr>
+        <a:xfrm>
+          <a:off x="0" y="0"/>
+          <a:ext cx="0" cy="0"/>
+          <a:chOff x="0" y="0"/>
+          <a:chExt cx="0" cy="0"/>
+        </a:xfrm>
+      </p:grpSpPr>
+      <p:sp>
+        <p:nvSpPr>
+          <p:cNvPr id="4" name="Rectangle: Rounded Corners 3">
+            <a:extLst>
+              <a:ext uri="{FF2B5EF4-FFF2-40B4-BE49-F238E27FC236}">
+                <a16:creationId xmlns:a16="http://schemas.microsoft.com/office/drawing/2014/main" id="{2344C8F1-F6C1-D8BA-A96D-5B2F1012797A}"/>
+              </a:ext>
+            </a:extLst>
+          </p:cNvPr>
+          <p:cNvSpPr/>
+          <p:nvPr/>
+        </p:nvSpPr>
+        <p:spPr>
+          <a:xfrm>
+            <a:off x="3396000" y="729000"/>
+            <a:ext cx="5400000" cy="5400000"/>
+          </a:xfrm>
+          <a:prstGeom prst="roundRect">
+            <a:avLst>
+              <a:gd name="adj" fmla="val 4903"/>
+            </a:avLst>
+          </a:prstGeom>
+          <a:pattFill prst="lgConfetti">
+            <a:fgClr>
+              <a:srgbClr val="0C4E43"/>
+            </a:fgClr>
+            <a:bgClr>
+              <a:srgbClr val="2D3E50"/>
+            </a:bgClr>
+          </a:pattFill>
+          <a:ln w="76200">
+            <a:noFill/>
+          </a:ln>
+          <a:effectLst>
+            <a:glow>
+              <a:srgbClr val="79DACA">
+                <a:alpha val="80000"/>
+              </a:srgbClr>
+            </a:glow>
+          </a:effectLst>
+        </p:spPr>
+        <p:style>
+          <a:lnRef idx="2">
+            <a:schemeClr val="accent1">
+              <a:shade val="15000"/>
+            </a:schemeClr>
+          </a:lnRef>
+          <a:fillRef idx="1">
+            <a:schemeClr val="accent1"/>
+          </a:fillRef>
+          <a:effectRef idx="0">
+            <a:schemeClr val="accent1"/>
+          </a:effectRef>
+          <a:fontRef idx="minor">
+            <a:schemeClr val="lt1"/>
+          </a:fontRef>
+        </p:style>
+        <p:txBody>
+          <a:bodyPr rtlCol="0" anchor="ctr">
+            <a:prstTxWarp prst="textCirclePour">
+              <a:avLst/>
+            </a:prstTxWarp>
+          </a:bodyPr>
+          <a:lstStyle/>
+          <a:p>
+            <a:pPr algn="ctr"/>
+            <a:r>
+              <a:rPr lang="en-US" sz="16600" dirty="0">
+                <a:solidFill>
+                  <a:srgbClr val="1FC2A7"/>
+                </a:solidFill>
+                <a:effectLst/>
+              </a:rPr>
+              <a:t>ARCEDITOR</a:t>
+            </a:r>
+            <a:endParaRPr lang="en-US" sz="21000" dirty="0">
+              <a:solidFill>
+                <a:srgbClr val="1FC2A7"/>
+              </a:solidFill>
+              <a:effectLst/>
+            </a:endParaRPr>
+          </a:p>
+        </p:txBody>
+      </p:sp>
+    </p:spTree>
+    <p:extLst>
+      <p:ext uri="{BB962C8B-B14F-4D97-AF65-F5344CB8AC3E}">
+        <p14:creationId xmlns:p14="http://schemas.microsoft.com/office/powerpoint/2010/main" val="3444340324"/>
+      </p:ext>
+    </p:extLst>
+  </p:cSld>
+  <p:clrMapOvr>
+    <a:masterClrMapping/>
+  </p:clrMapOvr>
+</p:sld>
+</file>
+
+<file path=ppt/slides/slide4.xml><?xml version="1.0" encoding="utf-8"?>
+<p:sld xmlns:a="http://schemas.openxmlformats.org/drawingml/2006/main" xmlns:r="http://schemas.openxmlformats.org/officeDocument/2006/relationships" xmlns:p="http://schemas.openxmlformats.org/presentationml/2006/main">
+  <p:cSld>
+    <p:spTree>
+      <p:nvGrpSpPr>
+        <p:cNvPr id="1" name="">
+          <a:extLst>
+            <a:ext uri="{FF2B5EF4-FFF2-40B4-BE49-F238E27FC236}">
+              <a16:creationId xmlns:a16="http://schemas.microsoft.com/office/drawing/2014/main" id="{16BF541C-6FA8-C131-22BF-641A0F7EEDA7}"/>
+            </a:ext>
+          </a:extLst>
+        </p:cNvPr>
+        <p:cNvGrpSpPr/>
+        <p:nvPr/>
+      </p:nvGrpSpPr>
+      <p:grpSpPr>
+        <a:xfrm>
+          <a:off x="0" y="0"/>
+          <a:ext cx="0" cy="0"/>
+          <a:chOff x="0" y="0"/>
+          <a:chExt cx="0" cy="0"/>
+        </a:xfrm>
+      </p:grpSpPr>
+      <p:sp>
+        <p:nvSpPr>
+          <p:cNvPr id="4" name="Logo Tile"/>
+          <p:cNvSpPr/>
+          <p:nvPr/>
+        </p:nvSpPr>
+        <p:spPr>
+          <a:xfrm>
+            <a:off x="3396000" y="729000"/>
+            <a:ext cx="5400000" cy="5400000"/>
+          </a:xfrm>
+          <a:prstGeom prst="roundRect">
+            <a:avLst>
+              <a:gd name="adj" fmla="val 22000"/>
+            </a:avLst>
+          </a:prstGeom>
+          <a:gradFill flip="none" rotWithShape="1">
+            <a:gsLst>
+              <a:gs pos="0">
+                <a:srgbClr val="0C4E43"/>
+              </a:gs>
+              <a:gs pos="45000">
+                <a:srgbClr val="1FC2A7"/>
+              </a:gs>
+              <a:gs pos="100000">
+                <a:srgbClr val="79DACA"/>
+              </a:gs>
+            </a:gsLst>
+            <a:lin ang="2700000" scaled="1"/>
+            <a:tileRect/>
+          </a:gradFill>
+          <a:ln w="19050">
+            <a:solidFill>
+              <a:srgbClr val="0C4E43">
+                <a:alpha val="45000"/>
+              </a:srgbClr>
+            </a:solidFill>
+          </a:ln>
+          <a:effectLst>
+            <a:outerShdw blurRad="190500" dist="63500" dir="5400000" rotWithShape="0">
+              <a:srgbClr val="1FC2A7">
+                <a:alpha val="55000"/>
+              </a:srgbClr>
+            </a:outerShdw>
+          </a:effectLst>
+        </p:spPr>
+        <p:txBody>
+          <a:bodyPr rtlCol="0" anchor="ctr"/>
+          <a:lstStyle/>
+          <a:p>
+            <a:pPr algn="ctr"/>
+            <a:endParaRPr lang="en-US"/>
+          </a:p>
+        </p:txBody>
+      </p:sp>
+    </p:spTree>
+    <p:extLst>
+      <p:ext uri="{BB962C8B-B14F-4D97-AF65-F5344CB8AC3E}">
+        <p14:creationId xmlns:p14="http://schemas.microsoft.com/office/powerpoint/2010/main" val="3778225466"/>
       </p:ext>
     </p:extLst>
   </p:cSld>
